--- a/docs/slide/post03_hardening.pptx
+++ b/docs/slide/post03_hardening.pptx
@@ -143,8 +143,7 @@
 <file path=ppt/revisionInfo.xml><?xml version="1.0" encoding="utf-8"?>
 <p1510:revInfo xmlns:a="http://schemas.openxmlformats.org/drawingml/2006/main" xmlns:r="http://schemas.openxmlformats.org/officeDocument/2006/relationships" xmlns:p1510="http://schemas.microsoft.com/office/powerpoint/2015/10/main">
   <p1510:revLst>
-    <p1510:client id="{1C14204D-38C5-4D77-BC32-C46FB8046D77}" v="599" dt="2026-10-23T00:23:20.269"/>
-    <p1510:client id="{6AFEEB8B-BB36-4A3A-B06E-F26CB7EBBCFC}" v="557" dt="2026-10-22T02:23:34.401"/>
+    <p1510:client id="{1C14204D-38C5-4D77-BC32-C46FB8046D77}" v="601" dt="2026-10-23T20:30:04.996"/>
   </p1510:revLst>
 </p1510:revInfo>
 </file>
@@ -154,12 +153,12 @@
   <pc:docChgLst>
     <pc:chgData name="Simon Fong" userId="0989948daaec8292" providerId="LiveId" clId="{F12E0490-60F3-4147-9D04-93D87D41D5A0}"/>
     <pc:docChg chg="undo redo custSel addSld delSld modSld sldOrd modMainMaster">
-      <pc:chgData name="Simon Fong" userId="0989948daaec8292" providerId="LiveId" clId="{F12E0490-60F3-4147-9D04-93D87D41D5A0}" dt="2026-10-23T00:28:29.267" v="15581" actId="12385"/>
+      <pc:chgData name="Simon Fong" userId="0989948daaec8292" providerId="LiveId" clId="{F12E0490-60F3-4147-9D04-93D87D41D5A0}" dt="2026-10-23T20:30:05.017" v="15586" actId="27636"/>
       <pc:docMkLst>
         <pc:docMk/>
       </pc:docMkLst>
       <pc:sldChg chg="addSp delSp modSp new mod modTransition setBg modClrScheme addAnim delAnim modAnim setClrOvrMap delDesignElem chgLayout">
-        <pc:chgData name="Simon Fong" userId="0989948daaec8292" providerId="LiveId" clId="{F12E0490-60F3-4147-9D04-93D87D41D5A0}" dt="2026-10-21T18:52:23.940" v="11643"/>
+        <pc:chgData name="Simon Fong" userId="0989948daaec8292" providerId="LiveId" clId="{F12E0490-60F3-4147-9D04-93D87D41D5A0}" dt="2026-10-23T20:30:05.017" v="15586" actId="27636"/>
         <pc:sldMkLst>
           <pc:docMk/>
           <pc:sldMk cId="500054961" sldId="256"/>
@@ -173,7 +172,7 @@
           </ac:spMkLst>
         </pc:spChg>
         <pc:spChg chg="mod">
-          <ac:chgData name="Simon Fong" userId="0989948daaec8292" providerId="LiveId" clId="{F12E0490-60F3-4147-9D04-93D87D41D5A0}" dt="2026-10-21T02:57:13.816" v="9107" actId="6549"/>
+          <ac:chgData name="Simon Fong" userId="0989948daaec8292" providerId="LiveId" clId="{F12E0490-60F3-4147-9D04-93D87D41D5A0}" dt="2026-10-23T20:30:05.017" v="15586" actId="27636"/>
           <ac:spMkLst>
             <pc:docMk/>
             <pc:sldMk cId="500054961" sldId="256"/>
@@ -1924,7 +1923,7 @@
           <a:p>
             <a:fld id="{DE5C3641-D97D-4221-8E4A-4CE191803EE4}" type="datetimeFigureOut">
               <a:rPr lang="en-CA" smtClean="0"/>
-              <a:t>2026-10-22</a:t>
+              <a:t>2026-10-23</a:t>
             </a:fld>
             <a:endParaRPr lang="en-CA"/>
           </a:p>
@@ -5411,7 +5410,7 @@
           <a:p>
             <a:fld id="{8D757EAC-F02C-41AB-966A-B857386BB5B4}" type="datetimeFigureOut">
               <a:rPr lang="en-CA" smtClean="0"/>
-              <a:t>2026-10-22</a:t>
+              <a:t>2026-10-23</a:t>
             </a:fld>
             <a:endParaRPr lang="en-CA"/>
           </a:p>
@@ -5611,7 +5610,7 @@
           <a:p>
             <a:fld id="{8D757EAC-F02C-41AB-966A-B857386BB5B4}" type="datetimeFigureOut">
               <a:rPr lang="en-CA" smtClean="0"/>
-              <a:t>2026-10-22</a:t>
+              <a:t>2026-10-23</a:t>
             </a:fld>
             <a:endParaRPr lang="en-CA"/>
           </a:p>
@@ -5821,7 +5820,7 @@
           <a:p>
             <a:fld id="{8D757EAC-F02C-41AB-966A-B857386BB5B4}" type="datetimeFigureOut">
               <a:rPr lang="en-CA" smtClean="0"/>
-              <a:t>2026-10-22</a:t>
+              <a:t>2026-10-23</a:t>
             </a:fld>
             <a:endParaRPr lang="en-CA"/>
           </a:p>
@@ -6112,7 +6111,7 @@
           <a:p>
             <a:fld id="{9961397C-706D-4EB8-B1E1-D1B680D284C3}" type="datetime1">
               <a:rPr lang="en-US" smtClean="0"/>
-              <a:t>10/22/2026</a:t>
+              <a:t>10/23/2026</a:t>
             </a:fld>
             <a:endParaRPr lang="en-US"/>
           </a:p>
@@ -6317,7 +6316,7 @@
           <a:p>
             <a:fld id="{8D757EAC-F02C-41AB-966A-B857386BB5B4}" type="datetimeFigureOut">
               <a:rPr lang="en-CA" smtClean="0"/>
-              <a:t>2026-10-22</a:t>
+              <a:t>2026-10-23</a:t>
             </a:fld>
             <a:endParaRPr lang="en-CA"/>
           </a:p>
@@ -6593,7 +6592,7 @@
           <a:p>
             <a:fld id="{8D757EAC-F02C-41AB-966A-B857386BB5B4}" type="datetimeFigureOut">
               <a:rPr lang="en-CA" smtClean="0"/>
-              <a:t>2026-10-22</a:t>
+              <a:t>2026-10-23</a:t>
             </a:fld>
             <a:endParaRPr lang="en-CA"/>
           </a:p>
@@ -6861,7 +6860,7 @@
           <a:p>
             <a:fld id="{8D757EAC-F02C-41AB-966A-B857386BB5B4}" type="datetimeFigureOut">
               <a:rPr lang="en-CA" smtClean="0"/>
-              <a:t>2026-10-22</a:t>
+              <a:t>2026-10-23</a:t>
             </a:fld>
             <a:endParaRPr lang="en-CA"/>
           </a:p>
@@ -7276,7 +7275,7 @@
           <a:p>
             <a:fld id="{8D757EAC-F02C-41AB-966A-B857386BB5B4}" type="datetimeFigureOut">
               <a:rPr lang="en-CA" smtClean="0"/>
-              <a:t>2026-10-22</a:t>
+              <a:t>2026-10-23</a:t>
             </a:fld>
             <a:endParaRPr lang="en-CA"/>
           </a:p>
@@ -7418,7 +7417,7 @@
           <a:p>
             <a:fld id="{8D757EAC-F02C-41AB-966A-B857386BB5B4}" type="datetimeFigureOut">
               <a:rPr lang="en-CA" smtClean="0"/>
-              <a:t>2026-10-22</a:t>
+              <a:t>2026-10-23</a:t>
             </a:fld>
             <a:endParaRPr lang="en-CA"/>
           </a:p>
@@ -7531,7 +7530,7 @@
           <a:p>
             <a:fld id="{8D757EAC-F02C-41AB-966A-B857386BB5B4}" type="datetimeFigureOut">
               <a:rPr lang="en-CA" smtClean="0"/>
-              <a:t>2026-10-22</a:t>
+              <a:t>2026-10-23</a:t>
             </a:fld>
             <a:endParaRPr lang="en-CA"/>
           </a:p>
@@ -7844,7 +7843,7 @@
           <a:p>
             <a:fld id="{8D757EAC-F02C-41AB-966A-B857386BB5B4}" type="datetimeFigureOut">
               <a:rPr lang="en-CA" smtClean="0"/>
-              <a:t>2026-10-22</a:t>
+              <a:t>2026-10-23</a:t>
             </a:fld>
             <a:endParaRPr lang="en-CA"/>
           </a:p>
@@ -8133,7 +8132,7 @@
           <a:p>
             <a:fld id="{8D757EAC-F02C-41AB-966A-B857386BB5B4}" type="datetimeFigureOut">
               <a:rPr lang="en-CA" smtClean="0"/>
-              <a:t>2026-10-22</a:t>
+              <a:t>2026-10-23</a:t>
             </a:fld>
             <a:endParaRPr lang="en-CA"/>
           </a:p>
@@ -8386,7 +8385,7 @@
           <a:p>
             <a:fld id="{8D757EAC-F02C-41AB-966A-B857386BB5B4}" type="datetimeFigureOut">
               <a:rPr lang="en-CA" smtClean="0"/>
-              <a:t>2026-10-22</a:t>
+              <a:t>2026-10-23</a:t>
             </a:fld>
             <a:endParaRPr lang="en-CA"/>
           </a:p>
@@ -9075,7 +9074,7 @@
                 </a:solidFill>
                 <a:latin typeface="Consolas" panose="020B0609020204030204" pitchFamily="49" charset="0"/>
               </a:rPr>
-              <a:t>Attack. Detect. Harden.</a:t>
+              <a:t>Attack. Detect. Harden. Integrate</a:t>
             </a:r>
           </a:p>
         </p:txBody>
@@ -10002,13 +10001,13 @@
   <p:clrMapOvr>
     <a:masterClrMapping/>
   </p:clrMapOvr>
-  <mc:AlternateContent xmlns:mc="http://schemas.openxmlformats.org/markup-compatibility/2006">
-    <mc:Choice xmlns:p159="http://schemas.microsoft.com/office/powerpoint/2015/09/main" Requires="p159">
+  <mc:AlternateContent xmlns:mc="http://schemas.openxmlformats.org/markup-compatibility/2006" xmlns:p159="http://schemas.microsoft.com/office/powerpoint/2015/09/main">
+    <mc:Choice Requires="p159">
       <p:transition xmlns:p14="http://schemas.microsoft.com/office/powerpoint/2010/main" spd="slow" p14:dur="1750" advClick="0" advTm="10000">
         <p159:morph option="byObject"/>
       </p:transition>
     </mc:Choice>
-    <mc:Fallback>
+    <mc:Fallback xmlns="">
       <p:transition spd="slow" advClick="0" advTm="10000">
         <p:fade/>
       </p:transition>
@@ -10992,13 +10991,13 @@
   <p:clrMapOvr>
     <a:masterClrMapping/>
   </p:clrMapOvr>
-  <mc:AlternateContent xmlns:mc="http://schemas.openxmlformats.org/markup-compatibility/2006">
-    <mc:Choice xmlns:p159="http://schemas.microsoft.com/office/powerpoint/2015/09/main" Requires="p159">
+  <mc:AlternateContent xmlns:mc="http://schemas.openxmlformats.org/markup-compatibility/2006" xmlns:p159="http://schemas.microsoft.com/office/powerpoint/2015/09/main">
+    <mc:Choice Requires="p159">
       <p:transition xmlns:p14="http://schemas.microsoft.com/office/powerpoint/2010/main" spd="slow" p14:dur="1750" advClick="0" advTm="20000">
         <p159:morph option="byObject"/>
       </p:transition>
     </mc:Choice>
-    <mc:Fallback>
+    <mc:Fallback xmlns="">
       <p:transition spd="slow" advClick="0" advTm="20000">
         <p:fade/>
       </p:transition>
@@ -12461,13 +12460,13 @@
   <p:clrMapOvr>
     <a:masterClrMapping/>
   </p:clrMapOvr>
-  <mc:AlternateContent xmlns:mc="http://schemas.openxmlformats.org/markup-compatibility/2006">
-    <mc:Choice xmlns:p159="http://schemas.microsoft.com/office/powerpoint/2015/09/main" Requires="p159">
+  <mc:AlternateContent xmlns:mc="http://schemas.openxmlformats.org/markup-compatibility/2006" xmlns:p159="http://schemas.microsoft.com/office/powerpoint/2015/09/main">
+    <mc:Choice Requires="p159">
       <p:transition xmlns:p14="http://schemas.microsoft.com/office/powerpoint/2010/main" spd="slow" p14:dur="1750" advClick="0" advTm="18000">
         <p159:morph option="byObject"/>
       </p:transition>
     </mc:Choice>
-    <mc:Fallback>
+    <mc:Fallback xmlns="">
       <p:transition spd="slow" advClick="0" advTm="18000">
         <p:fade/>
       </p:transition>
@@ -13751,13 +13750,13 @@
   <p:clrMapOvr>
     <a:masterClrMapping/>
   </p:clrMapOvr>
-  <mc:AlternateContent xmlns:mc="http://schemas.openxmlformats.org/markup-compatibility/2006">
-    <mc:Choice xmlns:p159="http://schemas.microsoft.com/office/powerpoint/2015/09/main" Requires="p159">
+  <mc:AlternateContent xmlns:mc="http://schemas.openxmlformats.org/markup-compatibility/2006" xmlns:p159="http://schemas.microsoft.com/office/powerpoint/2015/09/main">
+    <mc:Choice Requires="p159">
       <p:transition xmlns:p14="http://schemas.microsoft.com/office/powerpoint/2010/main" spd="slow" p14:dur="1750" advClick="0" advTm="16000">
         <p159:morph option="byObject"/>
       </p:transition>
     </mc:Choice>
-    <mc:Fallback>
+    <mc:Fallback xmlns="">
       <p:transition spd="slow" advClick="0" advTm="16000">
         <p:fade/>
       </p:transition>
@@ -14974,13 +14973,13 @@
   <p:clrMapOvr>
     <a:masterClrMapping/>
   </p:clrMapOvr>
-  <mc:AlternateContent xmlns:mc="http://schemas.openxmlformats.org/markup-compatibility/2006">
-    <mc:Choice xmlns:p159="http://schemas.microsoft.com/office/powerpoint/2015/09/main" Requires="p159">
+  <mc:AlternateContent xmlns:mc="http://schemas.openxmlformats.org/markup-compatibility/2006" xmlns:p159="http://schemas.microsoft.com/office/powerpoint/2015/09/main">
+    <mc:Choice Requires="p159">
       <p:transition xmlns:p14="http://schemas.microsoft.com/office/powerpoint/2010/main" spd="slow" p14:dur="1750" advClick="0" advTm="15000">
         <p159:morph option="byObject"/>
       </p:transition>
     </mc:Choice>
-    <mc:Fallback>
+    <mc:Fallback xmlns="">
       <p:transition spd="slow" advClick="0" advTm="15000">
         <p:fade/>
       </p:transition>
@@ -16069,13 +16068,13 @@
   <p:clrMapOvr>
     <a:masterClrMapping/>
   </p:clrMapOvr>
-  <mc:AlternateContent xmlns:mc="http://schemas.openxmlformats.org/markup-compatibility/2006">
-    <mc:Choice xmlns:p159="http://schemas.microsoft.com/office/powerpoint/2015/09/main" Requires="p159">
+  <mc:AlternateContent xmlns:mc="http://schemas.openxmlformats.org/markup-compatibility/2006" xmlns:p159="http://schemas.microsoft.com/office/powerpoint/2015/09/main">
+    <mc:Choice Requires="p159">
       <p:transition xmlns:p14="http://schemas.microsoft.com/office/powerpoint/2010/main" spd="slow" p14:dur="1750" advClick="0" advTm="11000">
         <p159:morph option="byObject"/>
       </p:transition>
     </mc:Choice>
-    <mc:Fallback>
+    <mc:Fallback xmlns="">
       <p:transition spd="slow" advClick="0" advTm="11000">
         <p:fade/>
       </p:transition>
@@ -17153,13 +17152,13 @@
   <p:clrMapOvr>
     <a:masterClrMapping/>
   </p:clrMapOvr>
-  <mc:AlternateContent xmlns:mc="http://schemas.openxmlformats.org/markup-compatibility/2006">
-    <mc:Choice xmlns:p159="http://schemas.microsoft.com/office/powerpoint/2015/09/main" Requires="p159">
+  <mc:AlternateContent xmlns:mc="http://schemas.openxmlformats.org/markup-compatibility/2006" xmlns:p159="http://schemas.microsoft.com/office/powerpoint/2015/09/main">
+    <mc:Choice Requires="p159">
       <p:transition xmlns:p14="http://schemas.microsoft.com/office/powerpoint/2010/main" spd="slow" p14:dur="1750" advClick="0" advTm="21000">
         <p159:morph option="byObject"/>
       </p:transition>
     </mc:Choice>
-    <mc:Fallback>
+    <mc:Fallback xmlns="">
       <p:transition spd="slow" advClick="0" advTm="21000">
         <p:fade/>
       </p:transition>
@@ -18549,13 +18548,13 @@
   <p:clrMapOvr>
     <a:masterClrMapping/>
   </p:clrMapOvr>
-  <mc:AlternateContent xmlns:mc="http://schemas.openxmlformats.org/markup-compatibility/2006">
-    <mc:Choice xmlns:p159="http://schemas.microsoft.com/office/powerpoint/2015/09/main" Requires="p159">
+  <mc:AlternateContent xmlns:mc="http://schemas.openxmlformats.org/markup-compatibility/2006" xmlns:p159="http://schemas.microsoft.com/office/powerpoint/2015/09/main">
+    <mc:Choice Requires="p159">
       <p:transition xmlns:p14="http://schemas.microsoft.com/office/powerpoint/2010/main" spd="slow" p14:dur="1750" advClick="0" advTm="14000">
         <p159:morph option="byObject"/>
       </p:transition>
     </mc:Choice>
-    <mc:Fallback>
+    <mc:Fallback xmlns="">
       <p:transition spd="slow" advClick="0" advTm="14000">
         <p:fade/>
       </p:transition>
@@ -19899,13 +19898,13 @@
   <p:clrMapOvr>
     <a:masterClrMapping/>
   </p:clrMapOvr>
-  <mc:AlternateContent xmlns:mc="http://schemas.openxmlformats.org/markup-compatibility/2006">
-    <mc:Choice xmlns:p159="http://schemas.microsoft.com/office/powerpoint/2015/09/main" Requires="p159">
+  <mc:AlternateContent xmlns:mc="http://schemas.openxmlformats.org/markup-compatibility/2006" xmlns:p159="http://schemas.microsoft.com/office/powerpoint/2015/09/main">
+    <mc:Choice Requires="p159">
       <p:transition xmlns:p14="http://schemas.microsoft.com/office/powerpoint/2010/main" spd="slow" p14:dur="1750" advClick="0" advTm="15000">
         <p159:morph option="byObject"/>
       </p:transition>
     </mc:Choice>
-    <mc:Fallback>
+    <mc:Fallback xmlns="">
       <p:transition spd="slow" advClick="0" advTm="15000">
         <p:fade/>
       </p:transition>
@@ -21006,13 +21005,13 @@
   <p:clrMapOvr>
     <a:masterClrMapping/>
   </p:clrMapOvr>
-  <mc:AlternateContent xmlns:mc="http://schemas.openxmlformats.org/markup-compatibility/2006">
-    <mc:Choice xmlns:p159="http://schemas.microsoft.com/office/powerpoint/2015/09/main" Requires="p159">
+  <mc:AlternateContent xmlns:mc="http://schemas.openxmlformats.org/markup-compatibility/2006" xmlns:p159="http://schemas.microsoft.com/office/powerpoint/2015/09/main">
+    <mc:Choice Requires="p159">
       <p:transition xmlns:p14="http://schemas.microsoft.com/office/powerpoint/2010/main" spd="slow" p14:dur="1750" advClick="0" advTm="11000">
         <p159:morph option="byObject"/>
       </p:transition>
     </mc:Choice>
-    <mc:Fallback>
+    <mc:Fallback xmlns="">
       <p:transition spd="slow" advClick="0" advTm="11000">
         <p:fade/>
       </p:transition>
@@ -21602,13 +21601,13 @@
   <p:clrMapOvr>
     <a:masterClrMapping/>
   </p:clrMapOvr>
-  <mc:AlternateContent xmlns:mc="http://schemas.openxmlformats.org/markup-compatibility/2006">
-    <mc:Choice xmlns:p159="http://schemas.microsoft.com/office/powerpoint/2015/09/main" Requires="p159">
+  <mc:AlternateContent xmlns:mc="http://schemas.openxmlformats.org/markup-compatibility/2006" xmlns:p159="http://schemas.microsoft.com/office/powerpoint/2015/09/main">
+    <mc:Choice Requires="p159">
       <p:transition xmlns:p14="http://schemas.microsoft.com/office/powerpoint/2010/main" spd="slow" p14:dur="1750" advClick="0" advTm="6000">
         <p159:morph option="byObject"/>
       </p:transition>
     </mc:Choice>
-    <mc:Fallback>
+    <mc:Fallback xmlns="">
       <p:transition spd="slow" advClick="0" advTm="6000">
         <p:fade/>
       </p:transition>
@@ -22559,13 +22558,13 @@
   <p:clrMapOvr>
     <a:masterClrMapping/>
   </p:clrMapOvr>
-  <mc:AlternateContent xmlns:mc="http://schemas.openxmlformats.org/markup-compatibility/2006">
-    <mc:Choice xmlns:p159="http://schemas.microsoft.com/office/powerpoint/2015/09/main" Requires="p159">
+  <mc:AlternateContent xmlns:mc="http://schemas.openxmlformats.org/markup-compatibility/2006" xmlns:p159="http://schemas.microsoft.com/office/powerpoint/2015/09/main">
+    <mc:Choice Requires="p159">
       <p:transition xmlns:p14="http://schemas.microsoft.com/office/powerpoint/2010/main" spd="slow" p14:dur="1750" advClick="0" advTm="16000">
         <p159:morph option="byObject"/>
       </p:transition>
     </mc:Choice>
-    <mc:Fallback>
+    <mc:Fallback xmlns="">
       <p:transition spd="slow" advClick="0" advTm="16000">
         <p:fade/>
       </p:transition>
@@ -23270,13 +23269,13 @@
   <p:clrMapOvr>
     <a:masterClrMapping/>
   </p:clrMapOvr>
-  <mc:AlternateContent xmlns:mc="http://schemas.openxmlformats.org/markup-compatibility/2006">
-    <mc:Choice xmlns:p159="http://schemas.microsoft.com/office/powerpoint/2015/09/main" Requires="p159">
+  <mc:AlternateContent xmlns:mc="http://schemas.openxmlformats.org/markup-compatibility/2006" xmlns:p159="http://schemas.microsoft.com/office/powerpoint/2015/09/main">
+    <mc:Choice Requires="p159">
       <p:transition xmlns:p14="http://schemas.microsoft.com/office/powerpoint/2010/main" spd="slow" p14:dur="1750" advClick="0" advTm="13000">
         <p159:morph option="byObject"/>
       </p:transition>
     </mc:Choice>
-    <mc:Fallback>
+    <mc:Fallback xmlns="">
       <p:transition spd="slow" advClick="0" advTm="13000">
         <p:fade/>
       </p:transition>
@@ -23784,13 +23783,13 @@
   <p:clrMapOvr>
     <a:masterClrMapping/>
   </p:clrMapOvr>
-  <mc:AlternateContent xmlns:mc="http://schemas.openxmlformats.org/markup-compatibility/2006">
-    <mc:Choice xmlns:p159="http://schemas.microsoft.com/office/powerpoint/2015/09/main" Requires="p159">
+  <mc:AlternateContent xmlns:mc="http://schemas.openxmlformats.org/markup-compatibility/2006" xmlns:p159="http://schemas.microsoft.com/office/powerpoint/2015/09/main">
+    <mc:Choice Requires="p159">
       <p:transition xmlns:p14="http://schemas.microsoft.com/office/powerpoint/2010/main" spd="slow" p14:dur="1750" advClick="0" advTm="10000">
         <p159:morph option="byObject"/>
       </p:transition>
     </mc:Choice>
-    <mc:Fallback>
+    <mc:Fallback xmlns="">
       <p:transition spd="slow" advClick="0" advTm="10000">
         <p:fade/>
       </p:transition>
@@ -24165,13 +24164,13 @@
   <p:clrMapOvr>
     <a:masterClrMapping/>
   </p:clrMapOvr>
-  <mc:AlternateContent xmlns:mc="http://schemas.openxmlformats.org/markup-compatibility/2006">
-    <mc:Choice xmlns:p159="http://schemas.microsoft.com/office/powerpoint/2015/09/main" Requires="p159">
+  <mc:AlternateContent xmlns:mc="http://schemas.openxmlformats.org/markup-compatibility/2006" xmlns:p159="http://schemas.microsoft.com/office/powerpoint/2015/09/main">
+    <mc:Choice Requires="p159">
       <p:transition xmlns:p14="http://schemas.microsoft.com/office/powerpoint/2010/main" spd="slow" p14:dur="1750" advClick="0" advTm="10000">
         <p159:morph option="byObject"/>
       </p:transition>
     </mc:Choice>
-    <mc:Fallback>
+    <mc:Fallback xmlns="">
       <p:transition spd="slow" advClick="0" advTm="10000">
         <p:fade/>
       </p:transition>
@@ -24546,13 +24545,13 @@
   <p:clrMapOvr>
     <a:masterClrMapping/>
   </p:clrMapOvr>
-  <mc:AlternateContent xmlns:mc="http://schemas.openxmlformats.org/markup-compatibility/2006">
-    <mc:Choice xmlns:p159="http://schemas.microsoft.com/office/powerpoint/2015/09/main" Requires="p159">
+  <mc:AlternateContent xmlns:mc="http://schemas.openxmlformats.org/markup-compatibility/2006" xmlns:p159="http://schemas.microsoft.com/office/powerpoint/2015/09/main">
+    <mc:Choice Requires="p159">
       <p:transition xmlns:p14="http://schemas.microsoft.com/office/powerpoint/2010/main" spd="slow" p14:dur="1750" advClick="0" advTm="10000">
         <p159:morph option="byObject"/>
       </p:transition>
     </mc:Choice>
-    <mc:Fallback>
+    <mc:Fallback xmlns="">
       <p:transition spd="slow" advClick="0" advTm="10000">
         <p:fade/>
       </p:transition>
@@ -25366,13 +25365,13 @@
   <p:clrMapOvr>
     <a:masterClrMapping/>
   </p:clrMapOvr>
-  <mc:AlternateContent xmlns:mc="http://schemas.openxmlformats.org/markup-compatibility/2006">
-    <mc:Choice xmlns:p159="http://schemas.microsoft.com/office/powerpoint/2015/09/main" Requires="p159">
+  <mc:AlternateContent xmlns:mc="http://schemas.openxmlformats.org/markup-compatibility/2006" xmlns:p159="http://schemas.microsoft.com/office/powerpoint/2015/09/main">
+    <mc:Choice Requires="p159">
       <p:transition xmlns:p14="http://schemas.microsoft.com/office/powerpoint/2010/main" spd="slow" p14:dur="1750" advClick="0" advTm="10000">
         <p159:morph option="byObject"/>
       </p:transition>
     </mc:Choice>
-    <mc:Fallback>
+    <mc:Fallback xmlns="">
       <p:transition spd="slow" advClick="0" advTm="10000">
         <p:fade/>
       </p:transition>
@@ -25798,13 +25797,13 @@
   <p:clrMapOvr>
     <a:masterClrMapping/>
   </p:clrMapOvr>
-  <mc:AlternateContent xmlns:mc="http://schemas.openxmlformats.org/markup-compatibility/2006">
-    <mc:Choice xmlns:p159="http://schemas.microsoft.com/office/powerpoint/2015/09/main" Requires="p159">
+  <mc:AlternateContent xmlns:mc="http://schemas.openxmlformats.org/markup-compatibility/2006" xmlns:p159="http://schemas.microsoft.com/office/powerpoint/2015/09/main">
+    <mc:Choice Requires="p159">
       <p:transition xmlns:p14="http://schemas.microsoft.com/office/powerpoint/2010/main" spd="slow" p14:dur="1750" advClick="0" advTm="5000">
         <p159:morph option="byObject"/>
       </p:transition>
     </mc:Choice>
-    <mc:Fallback>
+    <mc:Fallback xmlns="">
       <p:transition spd="slow" advClick="0" advTm="5000">
         <p:fade/>
       </p:transition>
@@ -27850,13 +27849,13 @@
   <p:clrMapOvr>
     <a:masterClrMapping/>
   </p:clrMapOvr>
-  <mc:AlternateContent xmlns:mc="http://schemas.openxmlformats.org/markup-compatibility/2006">
-    <mc:Choice xmlns:p159="http://schemas.microsoft.com/office/powerpoint/2015/09/main" Requires="p159">
+  <mc:AlternateContent xmlns:mc="http://schemas.openxmlformats.org/markup-compatibility/2006" xmlns:p159="http://schemas.microsoft.com/office/powerpoint/2015/09/main">
+    <mc:Choice Requires="p159">
       <p:transition xmlns:p14="http://schemas.microsoft.com/office/powerpoint/2010/main" spd="slow" p14:dur="1750" advClick="0" advTm="15000">
         <p159:morph option="byObject"/>
       </p:transition>
     </mc:Choice>
-    <mc:Fallback>
+    <mc:Fallback xmlns="">
       <p:transition spd="slow" advClick="0" advTm="15000">
         <p:fade/>
       </p:transition>
@@ -28911,13 +28910,13 @@
   <p:clrMapOvr>
     <a:masterClrMapping/>
   </p:clrMapOvr>
-  <mc:AlternateContent xmlns:mc="http://schemas.openxmlformats.org/markup-compatibility/2006">
-    <mc:Choice xmlns:p159="http://schemas.microsoft.com/office/powerpoint/2015/09/main" Requires="p159">
+  <mc:AlternateContent xmlns:mc="http://schemas.openxmlformats.org/markup-compatibility/2006" xmlns:p159="http://schemas.microsoft.com/office/powerpoint/2015/09/main">
+    <mc:Choice Requires="p159">
       <p:transition xmlns:p14="http://schemas.microsoft.com/office/powerpoint/2010/main" spd="slow" p14:dur="1750" advClick="0" advTm="10000">
         <p159:morph option="byObject"/>
       </p:transition>
     </mc:Choice>
-    <mc:Fallback>
+    <mc:Fallback xmlns="">
       <p:transition spd="slow" advClick="0" advTm="10000">
         <p:fade/>
       </p:transition>
@@ -29992,13 +29991,13 @@
   <p:clrMapOvr>
     <a:masterClrMapping/>
   </p:clrMapOvr>
-  <mc:AlternateContent xmlns:mc="http://schemas.openxmlformats.org/markup-compatibility/2006">
-    <mc:Choice xmlns:p159="http://schemas.microsoft.com/office/powerpoint/2015/09/main" Requires="p159">
+  <mc:AlternateContent xmlns:mc="http://schemas.openxmlformats.org/markup-compatibility/2006" xmlns:p159="http://schemas.microsoft.com/office/powerpoint/2015/09/main">
+    <mc:Choice Requires="p159">
       <p:transition xmlns:p14="http://schemas.microsoft.com/office/powerpoint/2010/main" spd="slow" p14:dur="1750" advClick="0" advTm="18000">
         <p159:morph option="byObject"/>
       </p:transition>
     </mc:Choice>
-    <mc:Fallback>
+    <mc:Fallback xmlns="">
       <p:transition spd="slow" advClick="0" advTm="18000">
         <p:fade/>
       </p:transition>
@@ -31377,13 +31376,13 @@
   <p:clrMapOvr>
     <a:masterClrMapping/>
   </p:clrMapOvr>
-  <mc:AlternateContent xmlns:mc="http://schemas.openxmlformats.org/markup-compatibility/2006">
-    <mc:Choice xmlns:p159="http://schemas.microsoft.com/office/powerpoint/2015/09/main" Requires="p159">
+  <mc:AlternateContent xmlns:mc="http://schemas.openxmlformats.org/markup-compatibility/2006" xmlns:p159="http://schemas.microsoft.com/office/powerpoint/2015/09/main">
+    <mc:Choice Requires="p159">
       <p:transition xmlns:p14="http://schemas.microsoft.com/office/powerpoint/2010/main" spd="slow" p14:dur="1750" advClick="0" advTm="15000">
         <p159:morph option="byObject"/>
       </p:transition>
     </mc:Choice>
-    <mc:Fallback>
+    <mc:Fallback xmlns="">
       <p:transition spd="slow" advClick="0" advTm="15000">
         <p:fade/>
       </p:transition>
@@ -32417,13 +32416,13 @@
   <p:clrMapOvr>
     <a:masterClrMapping/>
   </p:clrMapOvr>
-  <mc:AlternateContent xmlns:mc="http://schemas.openxmlformats.org/markup-compatibility/2006">
-    <mc:Choice xmlns:p159="http://schemas.microsoft.com/office/powerpoint/2015/09/main" Requires="p159">
+  <mc:AlternateContent xmlns:mc="http://schemas.openxmlformats.org/markup-compatibility/2006" xmlns:p159="http://schemas.microsoft.com/office/powerpoint/2015/09/main">
+    <mc:Choice Requires="p159">
       <p:transition xmlns:p14="http://schemas.microsoft.com/office/powerpoint/2010/main" spd="slow" p14:dur="1750" advClick="0" advTm="12000">
         <p159:morph option="byObject"/>
       </p:transition>
     </mc:Choice>
-    <mc:Fallback>
+    <mc:Fallback xmlns="">
       <p:transition spd="slow" advClick="0" advTm="12000">
         <p:fade/>
       </p:transition>
@@ -33571,13 +33570,13 @@
   <p:clrMapOvr>
     <a:masterClrMapping/>
   </p:clrMapOvr>
-  <mc:AlternateContent xmlns:mc="http://schemas.openxmlformats.org/markup-compatibility/2006">
-    <mc:Choice xmlns:p159="http://schemas.microsoft.com/office/powerpoint/2015/09/main" Requires="p159">
+  <mc:AlternateContent xmlns:mc="http://schemas.openxmlformats.org/markup-compatibility/2006" xmlns:p159="http://schemas.microsoft.com/office/powerpoint/2015/09/main">
+    <mc:Choice Requires="p159">
       <p:transition xmlns:p14="http://schemas.microsoft.com/office/powerpoint/2010/main" spd="slow" p14:dur="1750" advClick="0" advTm="14000">
         <p159:morph option="byObject"/>
       </p:transition>
     </mc:Choice>
-    <mc:Fallback>
+    <mc:Fallback xmlns="">
       <p:transition spd="slow" advClick="0" advTm="14000">
         <p:fade/>
       </p:transition>
